--- a/reports/uttar-pradesh-sir-2026-deck.pptx
+++ b/reports/uttar-pradesh-sir-2026-deck.pptx
@@ -2237,7 +2237,7 @@
       </p:sp>
       <p:pic>
         <p:nvPicPr>
-          <p:cNvPr id="4" name="Image 0" descr="/tmp/pack-8Tsy5x/up-uttarpradesh-9.png">    </p:cNvPr>
+          <p:cNvPr id="4" name="Image 0" descr="/tmp/pack-7qNEwO/up-uttarpradesh-9.png">    </p:cNvPr>
           <p:cNvPicPr>
             <a:picLocks noChangeAspect="1"/>
           </p:cNvPicPr>
@@ -2410,7 +2410,7 @@
       </p:sp>
       <p:pic>
         <p:nvPicPr>
-          <p:cNvPr id="4" name="Image 0" descr="/tmp/pack-8Tsy5x/up-uttarpradesh-10.png">    </p:cNvPr>
+          <p:cNvPr id="4" name="Image 0" descr="/tmp/pack-7qNEwO/up-uttarpradesh-10.png">    </p:cNvPr>
           <p:cNvPicPr>
             <a:picLocks noChangeAspect="1"/>
           </p:cNvPicPr>
@@ -2736,7 +2736,7 @@
       </p:sp>
       <p:pic>
         <p:nvPicPr>
-          <p:cNvPr id="4" name="Image 0" descr="/tmp/pack-8Tsy5x/up-uttarpradesh-1.png">    </p:cNvPr>
+          <p:cNvPr id="4" name="Image 0" descr="/tmp/pack-7qNEwO/up-uttarpradesh-1.png">    </p:cNvPr>
           <p:cNvPicPr>
             <a:picLocks noChangeAspect="1"/>
           </p:cNvPicPr>
@@ -2909,7 +2909,7 @@
       </p:sp>
       <p:pic>
         <p:nvPicPr>
-          <p:cNvPr id="4" name="Image 0" descr="/tmp/pack-8Tsy5x/up-uttarpradesh-2.png">    </p:cNvPr>
+          <p:cNvPr id="4" name="Image 0" descr="/tmp/pack-7qNEwO/up-uttarpradesh-2.png">    </p:cNvPr>
           <p:cNvPicPr>
             <a:picLocks noChangeAspect="1"/>
           </p:cNvPicPr>
@@ -3082,7 +3082,7 @@
       </p:sp>
       <p:pic>
         <p:nvPicPr>
-          <p:cNvPr id="4" name="Image 0" descr="/tmp/pack-8Tsy5x/up-uttarpradesh-3.png">    </p:cNvPr>
+          <p:cNvPr id="4" name="Image 0" descr="/tmp/pack-7qNEwO/up-uttarpradesh-3.png">    </p:cNvPr>
           <p:cNvPicPr>
             <a:picLocks noChangeAspect="1"/>
           </p:cNvPicPr>
@@ -3255,7 +3255,7 @@
       </p:sp>
       <p:pic>
         <p:nvPicPr>
-          <p:cNvPr id="4" name="Image 0" descr="/tmp/pack-8Tsy5x/up-uttarpradesh-4.png">    </p:cNvPr>
+          <p:cNvPr id="4" name="Image 0" descr="/tmp/pack-7qNEwO/up-uttarpradesh-4.png">    </p:cNvPr>
           <p:cNvPicPr>
             <a:picLocks noChangeAspect="1"/>
           </p:cNvPicPr>
@@ -3467,7 +3467,7 @@
       </p:sp>
       <p:pic>
         <p:nvPicPr>
-          <p:cNvPr id="4" name="Image 0" descr="/tmp/pack-8Tsy5x/up-uttarpradesh-5.png">    </p:cNvPr>
+          <p:cNvPr id="4" name="Image 0" descr="/tmp/pack-7qNEwO/up-uttarpradesh-5.png">    </p:cNvPr>
           <p:cNvPicPr>
             <a:picLocks noChangeAspect="1"/>
           </p:cNvPicPr>
@@ -3640,7 +3640,7 @@
       </p:sp>
       <p:pic>
         <p:nvPicPr>
-          <p:cNvPr id="4" name="Image 0" descr="/tmp/pack-8Tsy5x/up-uttarpradesh-6.png">    </p:cNvPr>
+          <p:cNvPr id="4" name="Image 0" descr="/tmp/pack-7qNEwO/up-uttarpradesh-6.png">    </p:cNvPr>
           <p:cNvPicPr>
             <a:picLocks noChangeAspect="1"/>
           </p:cNvPicPr>
@@ -3813,7 +3813,7 @@
       </p:sp>
       <p:pic>
         <p:nvPicPr>
-          <p:cNvPr id="4" name="Image 0" descr="/tmp/pack-8Tsy5x/up-uttarpradesh-7.png">    </p:cNvPr>
+          <p:cNvPr id="4" name="Image 0" descr="/tmp/pack-7qNEwO/up-uttarpradesh-7.png">    </p:cNvPr>
           <p:cNvPicPr>
             <a:picLocks noChangeAspect="1"/>
           </p:cNvPicPr>
@@ -3986,7 +3986,7 @@
       </p:sp>
       <p:pic>
         <p:nvPicPr>
-          <p:cNvPr id="4" name="Image 0" descr="/tmp/pack-8Tsy5x/up-uttarpradesh-8.png">    </p:cNvPr>
+          <p:cNvPr id="4" name="Image 0" descr="/tmp/pack-7qNEwO/up-uttarpradesh-8.png">    </p:cNvPr>
           <p:cNvPicPr>
             <a:picLocks noChangeAspect="1"/>
           </p:cNvPicPr>

--- a/reports/uttar-pradesh-sir-2026-deck.pptx
+++ b/reports/uttar-pradesh-sir-2026-deck.pptx
@@ -865,7 +865,7 @@
           <a:p>
             <a:r>
               <a:rPr lang="en-US" dirty="0"/>
-              <a:t>The draft roll left off 2.89 crore names, 18.7 of every 100 electors. The final roll was 84.3 lakh larger than the draft, 29.2% of what the draft left off. That rise counts new voters as well as names put back, so it is the most that can have been put back. A further 8.2 lakh were removed after the draft, as reported in the press.</a:t>
+              <a:t>The draft roll left off 2.89 crore names, 18.7 of every 100 electors. The final roll was 84.3 lakh larger than the draft, 29.2% of what the draft left off. That rise counts new voters as well as names put back, so it is the most that can have been put back. A further 8.2 lakh were deleted after the draft, as reported in the press.</a:t>
             </a:r>
             <a:endParaRPr lang="en-US" dirty="0"/>
           </a:p>
@@ -1305,7 +1305,7 @@
           <a:p>
             <a:r>
               <a:rPr lang="en-US" dirty="0"/>
-              <a:t>On this spread, the names left off were larger than the 2022 winning margin in 377 of the 403 constituencies. In the typical seat the margin was 19,684 votes and the spread puts 66,644 names left off. All 53 seats won by fewer than 5,000 votes are among them. Larger than the margin means the removals were large enough to decide the seat. It does not mean they did, since the people left off would not all have voted, nor all for one side. Spreading the state's total over the seats without the district split, as the All India margins page does, gives 381.</a:t>
+              <a:t>On this spread, the names left off were larger than the 2022 winning margin in 377 of the 403 constituencies. In the typical seat the margin was 19,684 votes and the spread puts 66,644 names left off. All 53 seats won by fewer than 5,000 votes are among them. Larger than the margin means the names left off were large enough to decide the seat. It does not mean they did, since the people left off would not all have voted, nor all for one side. Spreading the state's total over the seats without the district split, as the All India margins page does, gives 381.</a:t>
             </a:r>
             <a:endParaRPr lang="en-US" dirty="0"/>
           </a:p>
@@ -2097,7 +2097,7 @@
                 <a:ea typeface="Calibri" pitchFamily="34" charset="-122"/>
                 <a:cs typeface="Calibri" pitchFamily="34" charset="-120"/>
               </a:rPr>
-              <a:t>Spread over the constituencies of each district, the names left off were larger than the 2022 winning margin in 377 of the 403 seats. That shows the removals were large enough to decide those seats, and does not show that they did.</a:t>
+              <a:t>Spread over the constituencies of each district, the names left off were larger than the 2022 winning margin in 377 of the 403 seats. That shows the names left off were large enough to decide those seats, and does not show that they did.</a:t>
             </a:r>
             <a:endParaRPr lang="en-US" sz="1300" dirty="0"/>
           </a:p>
@@ -2119,7 +2119,7 @@
                 <a:ea typeface="Calibri" pitchFamily="34" charset="-122"/>
                 <a:cs typeface="Calibri" pitchFamily="34" charset="-120"/>
               </a:rPr>
-              <a:t>After the draft, notices went to 3.26 crore electors, 26.0 of every 100 on it, and 3.5 lakh were removed for not answering one.</a:t>
+              <a:t>After the draft, notices went to 3.26 crore electors, 26.0 of every 100 on it, and 3.5 lakh were deleted for not answering one.</a:t>
             </a:r>
             <a:endParaRPr lang="en-US" sz="1300" dirty="0"/>
           </a:p>
@@ -2237,7 +2237,7 @@
       </p:sp>
       <p:pic>
         <p:nvPicPr>
-          <p:cNvPr id="4" name="Image 0" descr="/tmp/pack-7qNEwO/up-uttarpradesh-9.png">    </p:cNvPr>
+          <p:cNvPr id="4" name="Image 0" descr="/tmp/pack-BpyxFC/up-uttarpradesh-9.png">    </p:cNvPr>
           <p:cNvPicPr>
             <a:picLocks noChangeAspect="1"/>
           </p:cNvPicPr>
@@ -2410,7 +2410,7 @@
       </p:sp>
       <p:pic>
         <p:nvPicPr>
-          <p:cNvPr id="4" name="Image 0" descr="/tmp/pack-7qNEwO/up-uttarpradesh-10.png">    </p:cNvPr>
+          <p:cNvPr id="4" name="Image 0" descr="/tmp/pack-BpyxFC/up-uttarpradesh-10.png">    </p:cNvPr>
           <p:cNvPicPr>
             <a:picLocks noChangeAspect="1"/>
           </p:cNvPicPr>
@@ -2736,7 +2736,7 @@
       </p:sp>
       <p:pic>
         <p:nvPicPr>
-          <p:cNvPr id="4" name="Image 0" descr="/tmp/pack-7qNEwO/up-uttarpradesh-1.png">    </p:cNvPr>
+          <p:cNvPr id="4" name="Image 0" descr="/tmp/pack-BpyxFC/up-uttarpradesh-1.png">    </p:cNvPr>
           <p:cNvPicPr>
             <a:picLocks noChangeAspect="1"/>
           </p:cNvPicPr>
@@ -2909,7 +2909,7 @@
       </p:sp>
       <p:pic>
         <p:nvPicPr>
-          <p:cNvPr id="4" name="Image 0" descr="/tmp/pack-7qNEwO/up-uttarpradesh-2.png">    </p:cNvPr>
+          <p:cNvPr id="4" name="Image 0" descr="/tmp/pack-BpyxFC/up-uttarpradesh-2.png">    </p:cNvPr>
           <p:cNvPicPr>
             <a:picLocks noChangeAspect="1"/>
           </p:cNvPicPr>
@@ -3082,7 +3082,7 @@
       </p:sp>
       <p:pic>
         <p:nvPicPr>
-          <p:cNvPr id="4" name="Image 0" descr="/tmp/pack-7qNEwO/up-uttarpradesh-3.png">    </p:cNvPr>
+          <p:cNvPr id="4" name="Image 0" descr="/tmp/pack-BpyxFC/up-uttarpradesh-3.png">    </p:cNvPr>
           <p:cNvPicPr>
             <a:picLocks noChangeAspect="1"/>
           </p:cNvPicPr>
@@ -3255,7 +3255,7 @@
       </p:sp>
       <p:pic>
         <p:nvPicPr>
-          <p:cNvPr id="4" name="Image 0" descr="/tmp/pack-7qNEwO/up-uttarpradesh-4.png">    </p:cNvPr>
+          <p:cNvPr id="4" name="Image 0" descr="/tmp/pack-BpyxFC/up-uttarpradesh-4.png">    </p:cNvPr>
           <p:cNvPicPr>
             <a:picLocks noChangeAspect="1"/>
           </p:cNvPicPr>
@@ -3467,7 +3467,7 @@
       </p:sp>
       <p:pic>
         <p:nvPicPr>
-          <p:cNvPr id="4" name="Image 0" descr="/tmp/pack-7qNEwO/up-uttarpradesh-5.png">    </p:cNvPr>
+          <p:cNvPr id="4" name="Image 0" descr="/tmp/pack-BpyxFC/up-uttarpradesh-5.png">    </p:cNvPr>
           <p:cNvPicPr>
             <a:picLocks noChangeAspect="1"/>
           </p:cNvPicPr>
@@ -3640,7 +3640,7 @@
       </p:sp>
       <p:pic>
         <p:nvPicPr>
-          <p:cNvPr id="4" name="Image 0" descr="/tmp/pack-7qNEwO/up-uttarpradesh-6.png">    </p:cNvPr>
+          <p:cNvPr id="4" name="Image 0" descr="/tmp/pack-BpyxFC/up-uttarpradesh-6.png">    </p:cNvPr>
           <p:cNvPicPr>
             <a:picLocks noChangeAspect="1"/>
           </p:cNvPicPr>
@@ -3813,7 +3813,7 @@
       </p:sp>
       <p:pic>
         <p:nvPicPr>
-          <p:cNvPr id="4" name="Image 0" descr="/tmp/pack-7qNEwO/up-uttarpradesh-7.png">    </p:cNvPr>
+          <p:cNvPr id="4" name="Image 0" descr="/tmp/pack-BpyxFC/up-uttarpradesh-7.png">    </p:cNvPr>
           <p:cNvPicPr>
             <a:picLocks noChangeAspect="1"/>
           </p:cNvPicPr>
@@ -3986,7 +3986,7 @@
       </p:sp>
       <p:pic>
         <p:nvPicPr>
-          <p:cNvPr id="4" name="Image 0" descr="/tmp/pack-7qNEwO/up-uttarpradesh-8.png">    </p:cNvPr>
+          <p:cNvPr id="4" name="Image 0" descr="/tmp/pack-BpyxFC/up-uttarpradesh-8.png">    </p:cNvPr>
           <p:cNvPicPr>
             <a:picLocks noChangeAspect="1"/>
           </p:cNvPicPr>

--- a/reports/uttar-pradesh-sir-2026-deck.pptx
+++ b/reports/uttar-pradesh-sir-2026-deck.pptx
@@ -2097,7 +2097,7 @@
                 <a:ea typeface="Calibri" pitchFamily="34" charset="-122"/>
                 <a:cs typeface="Calibri" pitchFamily="34" charset="-120"/>
               </a:rPr>
-              <a:t>Spread over the constituencies of each district, the names left off were larger than the 2022 winning margin in 377 of the 403 seats. That shows the names left off were large enough to decide those seats, and does not show that they did.</a:t>
+              <a:t>No count by constituency was published. If each district's names left off are shared out over its seats by their electors, the share is larger than the 2022 winning margin in 377 of the 403 seats. This estimates how many seats the names left off could have decided. It cannot say which seats, or that any result changed.</a:t>
             </a:r>
             <a:endParaRPr lang="en-US" sz="1300" dirty="0"/>
           </a:p>
@@ -2237,7 +2237,7 @@
       </p:sp>
       <p:pic>
         <p:nvPicPr>
-          <p:cNvPr id="4" name="Image 0" descr="/tmp/pack-BpyxFC/up-uttarpradesh-9.png">    </p:cNvPr>
+          <p:cNvPr id="4" name="Image 0" descr="/tmp/pack-dnioOA/up-uttarpradesh-9.png">    </p:cNvPr>
           <p:cNvPicPr>
             <a:picLocks noChangeAspect="1"/>
           </p:cNvPicPr>
@@ -2410,7 +2410,7 @@
       </p:sp>
       <p:pic>
         <p:nvPicPr>
-          <p:cNvPr id="4" name="Image 0" descr="/tmp/pack-BpyxFC/up-uttarpradesh-10.png">    </p:cNvPr>
+          <p:cNvPr id="4" name="Image 0" descr="/tmp/pack-dnioOA/up-uttarpradesh-10.png">    </p:cNvPr>
           <p:cNvPicPr>
             <a:picLocks noChangeAspect="1"/>
           </p:cNvPicPr>
@@ -2736,7 +2736,7 @@
       </p:sp>
       <p:pic>
         <p:nvPicPr>
-          <p:cNvPr id="4" name="Image 0" descr="/tmp/pack-BpyxFC/up-uttarpradesh-1.png">    </p:cNvPr>
+          <p:cNvPr id="4" name="Image 0" descr="/tmp/pack-dnioOA/up-uttarpradesh-1.png">    </p:cNvPr>
           <p:cNvPicPr>
             <a:picLocks noChangeAspect="1"/>
           </p:cNvPicPr>
@@ -2909,7 +2909,7 @@
       </p:sp>
       <p:pic>
         <p:nvPicPr>
-          <p:cNvPr id="4" name="Image 0" descr="/tmp/pack-BpyxFC/up-uttarpradesh-2.png">    </p:cNvPr>
+          <p:cNvPr id="4" name="Image 0" descr="/tmp/pack-dnioOA/up-uttarpradesh-2.png">    </p:cNvPr>
           <p:cNvPicPr>
             <a:picLocks noChangeAspect="1"/>
           </p:cNvPicPr>
@@ -3082,7 +3082,7 @@
       </p:sp>
       <p:pic>
         <p:nvPicPr>
-          <p:cNvPr id="4" name="Image 0" descr="/tmp/pack-BpyxFC/up-uttarpradesh-3.png">    </p:cNvPr>
+          <p:cNvPr id="4" name="Image 0" descr="/tmp/pack-dnioOA/up-uttarpradesh-3.png">    </p:cNvPr>
           <p:cNvPicPr>
             <a:picLocks noChangeAspect="1"/>
           </p:cNvPicPr>
@@ -3255,7 +3255,7 @@
       </p:sp>
       <p:pic>
         <p:nvPicPr>
-          <p:cNvPr id="4" name="Image 0" descr="/tmp/pack-BpyxFC/up-uttarpradesh-4.png">    </p:cNvPr>
+          <p:cNvPr id="4" name="Image 0" descr="/tmp/pack-dnioOA/up-uttarpradesh-4.png">    </p:cNvPr>
           <p:cNvPicPr>
             <a:picLocks noChangeAspect="1"/>
           </p:cNvPicPr>
@@ -3467,7 +3467,7 @@
       </p:sp>
       <p:pic>
         <p:nvPicPr>
-          <p:cNvPr id="4" name="Image 0" descr="/tmp/pack-BpyxFC/up-uttarpradesh-5.png">    </p:cNvPr>
+          <p:cNvPr id="4" name="Image 0" descr="/tmp/pack-dnioOA/up-uttarpradesh-5.png">    </p:cNvPr>
           <p:cNvPicPr>
             <a:picLocks noChangeAspect="1"/>
           </p:cNvPicPr>
@@ -3640,7 +3640,7 @@
       </p:sp>
       <p:pic>
         <p:nvPicPr>
-          <p:cNvPr id="4" name="Image 0" descr="/tmp/pack-BpyxFC/up-uttarpradesh-6.png">    </p:cNvPr>
+          <p:cNvPr id="4" name="Image 0" descr="/tmp/pack-dnioOA/up-uttarpradesh-6.png">    </p:cNvPr>
           <p:cNvPicPr>
             <a:picLocks noChangeAspect="1"/>
           </p:cNvPicPr>
@@ -3813,7 +3813,7 @@
       </p:sp>
       <p:pic>
         <p:nvPicPr>
-          <p:cNvPr id="4" name="Image 0" descr="/tmp/pack-BpyxFC/up-uttarpradesh-7.png">    </p:cNvPr>
+          <p:cNvPr id="4" name="Image 0" descr="/tmp/pack-dnioOA/up-uttarpradesh-7.png">    </p:cNvPr>
           <p:cNvPicPr>
             <a:picLocks noChangeAspect="1"/>
           </p:cNvPicPr>
@@ -3986,7 +3986,7 @@
       </p:sp>
       <p:pic>
         <p:nvPicPr>
-          <p:cNvPr id="4" name="Image 0" descr="/tmp/pack-BpyxFC/up-uttarpradesh-8.png">    </p:cNvPr>
+          <p:cNvPr id="4" name="Image 0" descr="/tmp/pack-dnioOA/up-uttarpradesh-8.png">    </p:cNvPr>
           <p:cNvPicPr>
             <a:picLocks noChangeAspect="1"/>
           </p:cNvPicPr>
@@ -4000,8 +4000,8 @@
         </p:blipFill>
         <p:spPr>
           <a:xfrm>
-            <a:off x="2459769" y="1691640"/>
-            <a:ext cx="7272158" cy="4617720"/>
+            <a:off x="2451864" y="1691640"/>
+            <a:ext cx="7287967" cy="4617720"/>
           </a:xfrm>
           <a:prstGeom prst="rect">
             <a:avLst/>
